--- a/set/2026-10-11 ECBC-CH.pptx
+++ b/set/2026-10-11 ECBC-CH.pptx
@@ -304,7 +304,7 @@
           <a:p>
             <a:fld id="{E759A0DE-F190-5444-87AC-4719D5F20D15}" type="datetimeFigureOut">
               <a:rPr lang="en-US" smtClean="0"/>
-              <a:t>10/8/26</a:t>
+              <a:t>10/11/26</a:t>
             </a:fld>
             <a:endParaRPr lang="en-US"/>
           </a:p>
@@ -502,7 +502,7 @@
           <a:p>
             <a:fld id="{E759A0DE-F190-5444-87AC-4719D5F20D15}" type="datetimeFigureOut">
               <a:rPr lang="en-US" smtClean="0"/>
-              <a:t>10/8/26</a:t>
+              <a:t>10/11/26</a:t>
             </a:fld>
             <a:endParaRPr lang="en-US"/>
           </a:p>
@@ -710,7 +710,7 @@
           <a:p>
             <a:fld id="{E759A0DE-F190-5444-87AC-4719D5F20D15}" type="datetimeFigureOut">
               <a:rPr lang="en-US" smtClean="0"/>
-              <a:t>10/8/26</a:t>
+              <a:t>10/11/26</a:t>
             </a:fld>
             <a:endParaRPr lang="en-US"/>
           </a:p>
@@ -908,7 +908,7 @@
           <a:p>
             <a:fld id="{E759A0DE-F190-5444-87AC-4719D5F20D15}" type="datetimeFigureOut">
               <a:rPr lang="en-US" smtClean="0"/>
-              <a:t>10/8/26</a:t>
+              <a:t>10/11/26</a:t>
             </a:fld>
             <a:endParaRPr lang="en-US"/>
           </a:p>
@@ -1183,7 +1183,7 @@
           <a:p>
             <a:fld id="{E759A0DE-F190-5444-87AC-4719D5F20D15}" type="datetimeFigureOut">
               <a:rPr lang="en-US" smtClean="0"/>
-              <a:t>10/8/26</a:t>
+              <a:t>10/11/26</a:t>
             </a:fld>
             <a:endParaRPr lang="en-US"/>
           </a:p>
@@ -1448,7 +1448,7 @@
           <a:p>
             <a:fld id="{E759A0DE-F190-5444-87AC-4719D5F20D15}" type="datetimeFigureOut">
               <a:rPr lang="en-US" smtClean="0"/>
-              <a:t>10/8/26</a:t>
+              <a:t>10/11/26</a:t>
             </a:fld>
             <a:endParaRPr lang="en-US"/>
           </a:p>
@@ -1860,7 +1860,7 @@
           <a:p>
             <a:fld id="{E759A0DE-F190-5444-87AC-4719D5F20D15}" type="datetimeFigureOut">
               <a:rPr lang="en-US" smtClean="0"/>
-              <a:t>10/8/26</a:t>
+              <a:t>10/11/26</a:t>
             </a:fld>
             <a:endParaRPr lang="en-US"/>
           </a:p>
@@ -2001,7 +2001,7 @@
           <a:p>
             <a:fld id="{E759A0DE-F190-5444-87AC-4719D5F20D15}" type="datetimeFigureOut">
               <a:rPr lang="en-US" smtClean="0"/>
-              <a:t>10/8/26</a:t>
+              <a:t>10/11/26</a:t>
             </a:fld>
             <a:endParaRPr lang="en-US"/>
           </a:p>
@@ -2114,7 +2114,7 @@
           <a:p>
             <a:fld id="{E759A0DE-F190-5444-87AC-4719D5F20D15}" type="datetimeFigureOut">
               <a:rPr lang="en-US" smtClean="0"/>
-              <a:t>10/8/26</a:t>
+              <a:t>10/11/26</a:t>
             </a:fld>
             <a:endParaRPr lang="en-US"/>
           </a:p>
@@ -2425,7 +2425,7 @@
           <a:p>
             <a:fld id="{E759A0DE-F190-5444-87AC-4719D5F20D15}" type="datetimeFigureOut">
               <a:rPr lang="en-US" smtClean="0"/>
-              <a:t>10/8/26</a:t>
+              <a:t>10/11/26</a:t>
             </a:fld>
             <a:endParaRPr lang="en-US"/>
           </a:p>
@@ -2713,7 +2713,7 @@
           <a:p>
             <a:fld id="{E759A0DE-F190-5444-87AC-4719D5F20D15}" type="datetimeFigureOut">
               <a:rPr lang="en-US" smtClean="0"/>
-              <a:t>10/8/26</a:t>
+              <a:t>10/11/26</a:t>
             </a:fld>
             <a:endParaRPr lang="en-US"/>
           </a:p>
@@ -2954,7 +2954,7 @@
           <a:p>
             <a:fld id="{E759A0DE-F190-5444-87AC-4719D5F20D15}" type="datetimeFigureOut">
               <a:rPr lang="en-US" smtClean="0"/>
-              <a:t>10/8/26</a:t>
+              <a:t>10/11/26</a:t>
             </a:fld>
             <a:endParaRPr lang="en-US"/>
           </a:p>
@@ -5001,6 +5001,29 @@
             <a:r>
               <a:rPr lang="en-US" sz="4000" dirty="0">
                 <a:solidFill>
+                  <a:schemeClr val="accent1">
+                    <a:lumMod val="40000"/>
+                    <a:lumOff val="60000"/>
+                  </a:schemeClr>
+                </a:solidFill>
+                <a:latin typeface="Avenir Medium" panose="02000503020000020003" pitchFamily="2" charset="0"/>
+                <a:ea typeface="Bodoni Ornaments" pitchFamily="2" charset="0"/>
+              </a:rPr>
+              <a:t>CAPO at 4th</a:t>
+            </a:r>
+            <a:endParaRPr lang="en-US" sz="4000" dirty="0">
+              <a:solidFill>
+                <a:srgbClr val="FFFF00"/>
+              </a:solidFill>
+              <a:latin typeface="Avenir Medium" panose="02000503020000020003" pitchFamily="2" charset="0"/>
+              <a:ea typeface="Bodoni Ornaments" pitchFamily="2" charset="0"/>
+            </a:endParaRPr>
+          </a:p>
+          <a:p>
+            <a:pPr algn="l"/>
+            <a:r>
+              <a:rPr lang="en-US" sz="4000" dirty="0">
+                <a:solidFill>
                   <a:srgbClr val="FFFF00"/>
                 </a:solidFill>
                 <a:latin typeface="Avenir Medium" panose="02000503020000020003" pitchFamily="2" charset="0"/>
@@ -6756,6 +6779,22 @@
             <a:r>
               <a:rPr lang="en-US" sz="3600" dirty="0">
                 <a:solidFill>
+                  <a:schemeClr val="accent1">
+                    <a:lumMod val="40000"/>
+                    <a:lumOff val="60000"/>
+                  </a:schemeClr>
+                </a:solidFill>
+                <a:latin typeface="Avenir Medium" panose="02000503020000020003" pitchFamily="2" charset="0"/>
+                <a:ea typeface="Bodoni Ornaments" pitchFamily="2" charset="0"/>
+              </a:rPr>
+              <a:t>CAPO 4th</a:t>
+            </a:r>
+          </a:p>
+          <a:p>
+            <a:pPr algn="l"/>
+            <a:r>
+              <a:rPr lang="en-US" sz="3600" dirty="0">
+                <a:solidFill>
                   <a:srgbClr val="FFFF00"/>
                 </a:solidFill>
                 <a:latin typeface="Avenir Medium" panose="02000503020000020003" pitchFamily="2" charset="0"/>
@@ -6763,26 +6802,6 @@
               </a:rPr>
               <a:t>G D A Bm</a:t>
             </a:r>
-            <a:endParaRPr lang="en-US" sz="3600" dirty="0">
-              <a:solidFill>
-                <a:schemeClr val="accent1">
-                  <a:lumMod val="40000"/>
-                  <a:lumOff val="60000"/>
-                </a:schemeClr>
-              </a:solidFill>
-              <a:latin typeface="Avenir Medium" panose="02000503020000020003" pitchFamily="2" charset="0"/>
-              <a:ea typeface="Bodoni Ornaments" pitchFamily="2" charset="0"/>
-            </a:endParaRPr>
-          </a:p>
-          <a:p>
-            <a:pPr algn="l"/>
-            <a:endParaRPr lang="en-US" sz="3600" dirty="0">
-              <a:solidFill>
-                <a:srgbClr val="FFFF00"/>
-              </a:solidFill>
-              <a:latin typeface="Avenir Medium" panose="02000503020000020003" pitchFamily="2" charset="0"/>
-              <a:ea typeface="Bodoni Ornaments" pitchFamily="2" charset="0"/>
-            </a:endParaRPr>
           </a:p>
           <a:p>
             <a:pPr algn="l"/>
@@ -7148,8 +7167,25 @@
                 <a:latin typeface="Avenir Medium" panose="02000503020000020003" pitchFamily="2" charset="0"/>
                 <a:ea typeface="Bodoni Ornaments" pitchFamily="2" charset="0"/>
               </a:rPr>
-              <a:t>Nothing compares to the promise I have in You</a:t>
-            </a:r>
+              <a:t>Nothing compares to the promise </a:t>
+            </a:r>
+            <a:r>
+              <a:rPr lang="en-US" sz="3600">
+                <a:solidFill>
+                  <a:schemeClr val="bg1"/>
+                </a:solidFill>
+                <a:latin typeface="Avenir Medium" panose="02000503020000020003" pitchFamily="2" charset="0"/>
+                <a:ea typeface="Bodoni Ornaments" pitchFamily="2" charset="0"/>
+              </a:rPr>
+              <a:t>I have</a:t>
+            </a:r>
+            <a:endParaRPr lang="en-US" sz="3600" dirty="0">
+              <a:solidFill>
+                <a:schemeClr val="bg1"/>
+              </a:solidFill>
+              <a:latin typeface="Avenir Medium" panose="02000503020000020003" pitchFamily="2" charset="0"/>
+              <a:ea typeface="Bodoni Ornaments" pitchFamily="2" charset="0"/>
+            </a:endParaRPr>
           </a:p>
         </p:txBody>
       </p:sp>
